--- a/classes/parte-3-hacking-etico-y-pentesting-metodologia/069-reconocimiento-activo/clase-069-presentacion.pptx
+++ b/classes/parte-3-hacking-etico-y-pentesting-metodologia/069-reconocimiento-activo/clase-069-presentacion.pptx
@@ -17,6 +17,9 @@
     <p:sldId id="265" r:id="rId16"/>
     <p:sldId id="266" r:id="rId17"/>
     <p:sldId id="267" r:id="rId18"/>
+    <p:sldId id="268" r:id="rId19"/>
+    <p:sldId id="269" r:id="rId20"/>
+    <p:sldId id="270" r:id="rId21"/>
   </p:sldIdLst>
   <p:sldSz cx="9144000" cy="6858000" type="screen4x3"/>
   <p:notesSz cx="6858000" cy="9144000"/>
@@ -3198,7 +3201,7 @@
                   <a:srgbClr val="0B3D2E"/>
                 </a:solidFill>
               </a:rPr>
-              <a:t>⚠️ Errores comunes</a:t>
+              <a:t>✍️ Ejercicios</a:t>
             </a:r>
           </a:p>
         </p:txBody>
@@ -3236,67 +3239,82 @@
                   <a:srgbClr val="22282E"/>
                 </a:solidFill>
               </a:rPr>
-              <a:t>•  "You requested a scan type which requires root" — Usa sudo o cambia a -sT</a:t>
-            </a:r>
-          </a:p>
-          <a:p>
-            <a:pPr>
-              <a:spcAft>
-                <a:spcPts val="600"/>
-              </a:spcAft>
-            </a:pPr>
-            <a:r>
-              <a:rPr sz="1500">
-                <a:solidFill>
-                  <a:srgbClr val="22282E"/>
-                </a:solidFill>
-              </a:rPr>
-              <a:t>•  Todos los puertos aparecen filtered — Firewall o host equivocado; verifica ruta y estado del host</a:t>
-            </a:r>
-          </a:p>
-          <a:p>
-            <a:pPr>
-              <a:spcAft>
-                <a:spcPts val="600"/>
-              </a:spcAft>
-            </a:pPr>
-            <a:r>
-              <a:rPr sz="1500">
-                <a:solidFill>
-                  <a:srgbClr val="22282E"/>
-                </a:solidFill>
-              </a:rPr>
-              <a:t>•  Escaneo UDP eterno — Es normal; limita puertos con -p y usa --host-timeout</a:t>
-            </a:r>
-          </a:p>
-          <a:p>
-            <a:pPr>
-              <a:spcAft>
-                <a:spcPts val="600"/>
-              </a:spcAft>
-            </a:pPr>
-            <a:r>
-              <a:rPr sz="1500">
-                <a:solidFill>
-                  <a:srgbClr val="22282E"/>
-                </a:solidFill>
-              </a:rPr>
-              <a:t>•  -O no acierta el SO — Pocos puertos abiertos; añade -sV y --osscan-guess</a:t>
-            </a:r>
-          </a:p>
-          <a:p>
-            <a:pPr>
-              <a:spcAft>
-                <a:spcPts val="600"/>
-              </a:spcAft>
-            </a:pPr>
-            <a:r>
-              <a:rPr sz="1500">
-                <a:solidFill>
-                  <a:srgbClr val="22282E"/>
-                </a:solidFill>
-              </a:rPr>
-              <a:t>•  Detectan el escaneo al instante — -T5 es muy ruidoso; baja a -T2 y usa --scan-delay</a:t>
+              <a:t>•  Explica por qué -sS requiere root y -sT no.</a:t>
+            </a:r>
+          </a:p>
+          <a:p>
+            <a:pPr>
+              <a:spcAft>
+                <a:spcPts val="600"/>
+              </a:spcAft>
+            </a:pPr>
+            <a:r>
+              <a:rPr sz="1500">
+                <a:solidFill>
+                  <a:srgbClr val="22282E"/>
+                </a:solidFill>
+              </a:rPr>
+              <a:t>•  Compara el tiempo de un escaneo -T2 frente a -T4 sobre el mismo objetivo.</a:t>
+            </a:r>
+          </a:p>
+          <a:p>
+            <a:pPr>
+              <a:spcAft>
+                <a:spcPts val="600"/>
+              </a:spcAft>
+            </a:pPr>
+            <a:r>
+              <a:rPr sz="1500">
+                <a:solidFill>
+                  <a:srgbClr val="22282E"/>
+                </a:solidFill>
+              </a:rPr>
+              <a:t>•  Usa NSE para obtener el título HTTP de un servidor web (--script http-title).</a:t>
+            </a:r>
+          </a:p>
+          <a:p>
+            <a:pPr>
+              <a:spcAft>
+                <a:spcPts val="600"/>
+              </a:spcAft>
+            </a:pPr>
+            <a:r>
+              <a:rPr sz="1500">
+                <a:solidFill>
+                  <a:srgbClr val="22282E"/>
+                </a:solidFill>
+              </a:rPr>
+              <a:t>•  Escanea solo los puertos UDP 53 y 161 e interpreta los estados open|filtered.</a:t>
+            </a:r>
+          </a:p>
+          <a:p>
+            <a:pPr>
+              <a:spcAft>
+                <a:spcPts val="600"/>
+              </a:spcAft>
+            </a:pPr>
+            <a:r>
+              <a:rPr sz="1500">
+                <a:solidFill>
+                  <a:srgbClr val="22282E"/>
+                </a:solidFill>
+              </a:rPr>
+              <a:t>•  Genera salida -oA y localiza el archivo .gnmap: ¿para qué sirve?</a:t>
+            </a:r>
+          </a:p>
+          <a:p>
+            <a:pPr>
+              <a:spcAft>
+                <a:spcPts val="600"/>
+              </a:spcAft>
+            </a:pPr>
+            <a:r>
+              <a:rPr sz="1500">
+                <a:solidFill>
+                  <a:srgbClr val="22282E"/>
+                </a:solidFill>
+              </a:rPr>
+              <a:t>•  Diseña un comando de escaneo sigiloso con --scan-delay y -T1.</a:t>
             </a:r>
           </a:p>
         </p:txBody>
@@ -3347,7 +3365,7 @@
                   <a:srgbClr val="0B3D2E"/>
                 </a:solidFill>
               </a:rPr>
-              <a:t>❓ Preguntas frecuentes</a:t>
+              <a:t>📝 Reto verificable</a:t>
             </a:r>
           </a:p>
         </p:txBody>
@@ -3385,97 +3403,22 @@
                   <a:srgbClr val="22282E"/>
                 </a:solidFill>
               </a:rPr>
-              <a:t>•  ❓ ¿masscan reemplaza a nmap?</a:t>
-            </a:r>
-          </a:p>
-          <a:p>
-            <a:pPr>
-              <a:spcAft>
-                <a:spcPts val="600"/>
-              </a:spcAft>
-            </a:pPr>
-            <a:r>
-              <a:rPr sz="1500">
-                <a:solidFill>
-                  <a:srgbClr val="22282E"/>
-                </a:solidFill>
-              </a:rPr>
-              <a:t>•  No. masscan es ultrarrápido para descubrir puertos abiertos en rangos enormes, pero nmap es superior en detección de versión y NSE. Se combinan: masscan para descubrir, nmap para profundizar.</a:t>
-            </a:r>
-          </a:p>
-          <a:p>
-            <a:pPr>
-              <a:spcAft>
-                <a:spcPts val="600"/>
-              </a:spcAft>
-            </a:pPr>
-            <a:r>
-              <a:rPr sz="1500">
-                <a:solidFill>
-                  <a:srgbClr val="22282E"/>
-                </a:solidFill>
-              </a:rPr>
-              <a:t>•  ❓ ¿Por qué a veces un puerto sale open|filtered?</a:t>
-            </a:r>
-          </a:p>
-          <a:p>
-            <a:pPr>
-              <a:spcAft>
-                <a:spcPts val="600"/>
-              </a:spcAft>
-            </a:pPr>
-            <a:r>
-              <a:rPr sz="1500">
-                <a:solidFill>
-                  <a:srgbClr val="22282E"/>
-                </a:solidFill>
-              </a:rPr>
-              <a:t>•  Es típico en UDP: nmap no recibe respuesta y no puede distinguir si está abierto o filtrado. Usa scripts o -sV para confirmar.</a:t>
-            </a:r>
-          </a:p>
-          <a:p>
-            <a:pPr>
-              <a:spcAft>
-                <a:spcPts val="600"/>
-              </a:spcAft>
-            </a:pPr>
-            <a:r>
-              <a:rPr sz="1500">
-                <a:solidFill>
-                  <a:srgbClr val="22282E"/>
-                </a:solidFill>
-              </a:rPr>
-              <a:t>•  ❓ ¿El escaneo puede tumbar un servicio?</a:t>
-            </a:r>
-          </a:p>
-          <a:p>
-            <a:pPr>
-              <a:spcAft>
-                <a:spcPts val="600"/>
-              </a:spcAft>
-            </a:pPr>
-            <a:r>
-              <a:rPr sz="1500">
-                <a:solidFill>
-                  <a:srgbClr val="22282E"/>
-                </a:solidFill>
-              </a:rPr>
-              <a:t>•  Sí, servicios frágiles (impresoras, SCADA, dispositivos IoT) pueden caer con escaneos agresivos. Baja el timing y coordínalo con el cliente si están en alcance.</a:t>
-            </a:r>
-          </a:p>
-          <a:p>
-            <a:pPr>
-              <a:spcAft>
-                <a:spcPts val="600"/>
-              </a:spcAft>
-            </a:pPr>
-            <a:r>
-              <a:rPr sz="1500">
-                <a:solidFill>
-                  <a:srgbClr val="22282E"/>
-                </a:solidFill>
-              </a:rPr>
-              <a:t>•  ❓ ¿Qué scripts NSE son seguros?</a:t>
+              <a:t>•  Produce un inventario de servicios de tu VM objetivo: lista de puertos abiertos TCP y UDP, servicio, versión y sistema operativo estimado, guardado con -oA.</a:t>
+            </a:r>
+          </a:p>
+          <a:p>
+            <a:pPr>
+              <a:spcAft>
+                <a:spcPts val="600"/>
+              </a:spcAft>
+            </a:pPr>
+            <a:r>
+              <a:rPr sz="1500">
+                <a:solidFill>
+                  <a:srgbClr val="22282E"/>
+                </a:solidFill>
+              </a:rPr>
+              <a:t>•  Criterio de aceptación: el inventario incluye al menos cinco puertos abiertos con su versión (-sV), un intento de detección de SO y los ficheros de salida .nmap, .gnmap y .xml presentes en disco.</a:t>
             </a:r>
           </a:p>
         </p:txBody>
@@ -3526,7 +3469,7 @@
                   <a:srgbClr val="0B3D2E"/>
                 </a:solidFill>
               </a:rPr>
-              <a:t>🔗 Referencias</a:t>
+              <a:t>⚠️ Errores comunes</a:t>
             </a:r>
           </a:p>
         </p:txBody>
@@ -3564,6 +3507,334 @@
                   <a:srgbClr val="22282E"/>
                 </a:solidFill>
               </a:rPr>
+              <a:t>•  "You requested a scan type which requires root" — Usa sudo o cambia a -sT</a:t>
+            </a:r>
+          </a:p>
+          <a:p>
+            <a:pPr>
+              <a:spcAft>
+                <a:spcPts val="600"/>
+              </a:spcAft>
+            </a:pPr>
+            <a:r>
+              <a:rPr sz="1500">
+                <a:solidFill>
+                  <a:srgbClr val="22282E"/>
+                </a:solidFill>
+              </a:rPr>
+              <a:t>•  Todos los puertos aparecen filtered — Firewall o host equivocado; verifica ruta y estado del host</a:t>
+            </a:r>
+          </a:p>
+          <a:p>
+            <a:pPr>
+              <a:spcAft>
+                <a:spcPts val="600"/>
+              </a:spcAft>
+            </a:pPr>
+            <a:r>
+              <a:rPr sz="1500">
+                <a:solidFill>
+                  <a:srgbClr val="22282E"/>
+                </a:solidFill>
+              </a:rPr>
+              <a:t>•  Escaneo UDP eterno — Es normal; limita puertos con -p y usa --host-timeout</a:t>
+            </a:r>
+          </a:p>
+          <a:p>
+            <a:pPr>
+              <a:spcAft>
+                <a:spcPts val="600"/>
+              </a:spcAft>
+            </a:pPr>
+            <a:r>
+              <a:rPr sz="1500">
+                <a:solidFill>
+                  <a:srgbClr val="22282E"/>
+                </a:solidFill>
+              </a:rPr>
+              <a:t>•  -O no acierta el SO — Pocos puertos abiertos; añade -sV y --osscan-guess</a:t>
+            </a:r>
+          </a:p>
+          <a:p>
+            <a:pPr>
+              <a:spcAft>
+                <a:spcPts val="600"/>
+              </a:spcAft>
+            </a:pPr>
+            <a:r>
+              <a:rPr sz="1500">
+                <a:solidFill>
+                  <a:srgbClr val="22282E"/>
+                </a:solidFill>
+              </a:rPr>
+              <a:t>•  Detectan el escaneo al instante — -T5 es muy ruidoso; baja a -T2 y usa --scan-delay</a:t>
+            </a:r>
+          </a:p>
+        </p:txBody>
+      </p:sp>
+    </p:spTree>
+  </p:cSld>
+  <p:clrMapOvr>
+    <a:masterClrMapping/>
+  </p:clrMapOvr>
+</p:sld>
+</file>
+
+<file path=ppt/slides/slide13.xml><?xml version="1.0" encoding="utf-8"?>
+<p:sld xmlns:a="http://schemas.openxmlformats.org/drawingml/2006/main" xmlns:p="http://schemas.openxmlformats.org/presentationml/2006/main" xmlns:r="http://schemas.openxmlformats.org/officeDocument/2006/relationships">
+  <p:cSld>
+    <p:spTree>
+      <p:nvGrpSpPr>
+        <p:cNvPr id="1" name=""/>
+        <p:cNvGrpSpPr/>
+        <p:nvPr/>
+      </p:nvGrpSpPr>
+      <p:grpSpPr/>
+      <p:sp>
+        <p:nvSpPr>
+          <p:cNvPr id="2" name="TextBox 1"/>
+          <p:cNvSpPr txBox="1"/>
+          <p:nvPr/>
+        </p:nvSpPr>
+        <p:spPr>
+          <a:xfrm>
+            <a:off x="457200" y="320040"/>
+            <a:ext cx="8229600" cy="822960"/>
+          </a:xfrm>
+          <a:prstGeom prst="rect">
+            <a:avLst/>
+          </a:prstGeom>
+          <a:noFill/>
+        </p:spPr>
+        <p:txBody>
+          <a:bodyPr wrap="square">
+            <a:spAutoFit/>
+          </a:bodyPr>
+          <a:lstStyle/>
+          <a:p>
+            <a:r>
+              <a:rPr sz="2600" b="1">
+                <a:solidFill>
+                  <a:srgbClr val="0B3D2E"/>
+                </a:solidFill>
+              </a:rPr>
+              <a:t>❓ Preguntas frecuentes</a:t>
+            </a:r>
+          </a:p>
+        </p:txBody>
+      </p:sp>
+      <p:sp>
+        <p:nvSpPr>
+          <p:cNvPr id="3" name="TextBox 2"/>
+          <p:cNvSpPr txBox="1"/>
+          <p:nvPr/>
+        </p:nvSpPr>
+        <p:spPr>
+          <a:xfrm>
+            <a:off x="457200" y="1280160"/>
+            <a:ext cx="8229600" cy="4937760"/>
+          </a:xfrm>
+          <a:prstGeom prst="rect">
+            <a:avLst/>
+          </a:prstGeom>
+          <a:noFill/>
+        </p:spPr>
+        <p:txBody>
+          <a:bodyPr wrap="square">
+            <a:spAutoFit/>
+          </a:bodyPr>
+          <a:lstStyle/>
+          <a:p>
+            <a:pPr>
+              <a:spcAft>
+                <a:spcPts val="600"/>
+              </a:spcAft>
+            </a:pPr>
+            <a:r>
+              <a:rPr sz="1500">
+                <a:solidFill>
+                  <a:srgbClr val="22282E"/>
+                </a:solidFill>
+              </a:rPr>
+              <a:t>•  ❓ ¿masscan reemplaza a nmap?</a:t>
+            </a:r>
+          </a:p>
+          <a:p>
+            <a:pPr>
+              <a:spcAft>
+                <a:spcPts val="600"/>
+              </a:spcAft>
+            </a:pPr>
+            <a:r>
+              <a:rPr sz="1500">
+                <a:solidFill>
+                  <a:srgbClr val="22282E"/>
+                </a:solidFill>
+              </a:rPr>
+              <a:t>•  No. masscan es ultrarrápido para descubrir puertos abiertos en rangos enormes, pero nmap es superior en detección de versión y NSE. Se combinan: masscan para descubrir, nmap para profundizar.</a:t>
+            </a:r>
+          </a:p>
+          <a:p>
+            <a:pPr>
+              <a:spcAft>
+                <a:spcPts val="600"/>
+              </a:spcAft>
+            </a:pPr>
+            <a:r>
+              <a:rPr sz="1500">
+                <a:solidFill>
+                  <a:srgbClr val="22282E"/>
+                </a:solidFill>
+              </a:rPr>
+              <a:t>•  ❓ ¿Por qué a veces un puerto sale open|filtered?</a:t>
+            </a:r>
+          </a:p>
+          <a:p>
+            <a:pPr>
+              <a:spcAft>
+                <a:spcPts val="600"/>
+              </a:spcAft>
+            </a:pPr>
+            <a:r>
+              <a:rPr sz="1500">
+                <a:solidFill>
+                  <a:srgbClr val="22282E"/>
+                </a:solidFill>
+              </a:rPr>
+              <a:t>•  Es típico en UDP: nmap no recibe respuesta y no puede distinguir si está abierto o filtrado. Usa scripts o -sV para confirmar.</a:t>
+            </a:r>
+          </a:p>
+          <a:p>
+            <a:pPr>
+              <a:spcAft>
+                <a:spcPts val="600"/>
+              </a:spcAft>
+            </a:pPr>
+            <a:r>
+              <a:rPr sz="1500">
+                <a:solidFill>
+                  <a:srgbClr val="22282E"/>
+                </a:solidFill>
+              </a:rPr>
+              <a:t>•  ❓ ¿El escaneo puede tumbar un servicio?</a:t>
+            </a:r>
+          </a:p>
+          <a:p>
+            <a:pPr>
+              <a:spcAft>
+                <a:spcPts val="600"/>
+              </a:spcAft>
+            </a:pPr>
+            <a:r>
+              <a:rPr sz="1500">
+                <a:solidFill>
+                  <a:srgbClr val="22282E"/>
+                </a:solidFill>
+              </a:rPr>
+              <a:t>•  Sí, servicios frágiles (impresoras, SCADA, dispositivos IoT) pueden caer con escaneos agresivos. Baja el timing y coordínalo con el cliente si están en alcance.</a:t>
+            </a:r>
+          </a:p>
+          <a:p>
+            <a:pPr>
+              <a:spcAft>
+                <a:spcPts val="600"/>
+              </a:spcAft>
+            </a:pPr>
+            <a:r>
+              <a:rPr sz="1500">
+                <a:solidFill>
+                  <a:srgbClr val="22282E"/>
+                </a:solidFill>
+              </a:rPr>
+              <a:t>•  ❓ ¿Qué scripts NSE son seguros?</a:t>
+            </a:r>
+          </a:p>
+        </p:txBody>
+      </p:sp>
+    </p:spTree>
+  </p:cSld>
+  <p:clrMapOvr>
+    <a:masterClrMapping/>
+  </p:clrMapOvr>
+</p:sld>
+</file>
+
+<file path=ppt/slides/slide14.xml><?xml version="1.0" encoding="utf-8"?>
+<p:sld xmlns:a="http://schemas.openxmlformats.org/drawingml/2006/main" xmlns:p="http://schemas.openxmlformats.org/presentationml/2006/main" xmlns:r="http://schemas.openxmlformats.org/officeDocument/2006/relationships">
+  <p:cSld>
+    <p:spTree>
+      <p:nvGrpSpPr>
+        <p:cNvPr id="1" name=""/>
+        <p:cNvGrpSpPr/>
+        <p:nvPr/>
+      </p:nvGrpSpPr>
+      <p:grpSpPr/>
+      <p:sp>
+        <p:nvSpPr>
+          <p:cNvPr id="2" name="TextBox 1"/>
+          <p:cNvSpPr txBox="1"/>
+          <p:nvPr/>
+        </p:nvSpPr>
+        <p:spPr>
+          <a:xfrm>
+            <a:off x="457200" y="320040"/>
+            <a:ext cx="8229600" cy="822960"/>
+          </a:xfrm>
+          <a:prstGeom prst="rect">
+            <a:avLst/>
+          </a:prstGeom>
+          <a:noFill/>
+        </p:spPr>
+        <p:txBody>
+          <a:bodyPr wrap="square">
+            <a:spAutoFit/>
+          </a:bodyPr>
+          <a:lstStyle/>
+          <a:p>
+            <a:r>
+              <a:rPr sz="2600" b="1">
+                <a:solidFill>
+                  <a:srgbClr val="0B3D2E"/>
+                </a:solidFill>
+              </a:rPr>
+              <a:t>🔗 Referencias</a:t>
+            </a:r>
+          </a:p>
+        </p:txBody>
+      </p:sp>
+      <p:sp>
+        <p:nvSpPr>
+          <p:cNvPr id="3" name="TextBox 2"/>
+          <p:cNvSpPr txBox="1"/>
+          <p:nvPr/>
+        </p:nvSpPr>
+        <p:spPr>
+          <a:xfrm>
+            <a:off x="457200" y="1280160"/>
+            <a:ext cx="8229600" cy="4937760"/>
+          </a:xfrm>
+          <a:prstGeom prst="rect">
+            <a:avLst/>
+          </a:prstGeom>
+          <a:noFill/>
+        </p:spPr>
+        <p:txBody>
+          <a:bodyPr wrap="square">
+            <a:spAutoFit/>
+          </a:bodyPr>
+          <a:lstStyle/>
+          <a:p>
+            <a:pPr>
+              <a:spcAft>
+                <a:spcPts val="600"/>
+              </a:spcAft>
+            </a:pPr>
+            <a:r>
+              <a:rPr sz="1500">
+                <a:solidFill>
+                  <a:srgbClr val="22282E"/>
+                </a:solidFill>
+              </a:rPr>
               <a:t>•  Lyon, G. Nmap Network Scanning — &lt;https://nmap.org/book/&gt;</a:t>
             </a:r>
           </a:p>
@@ -3614,6 +3885,81 @@
           </a:p>
         </p:txBody>
       </p:sp>
+    </p:spTree>
+  </p:cSld>
+  <p:clrMapOvr>
+    <a:masterClrMapping/>
+  </p:clrMapOvr>
+</p:sld>
+</file>
+
+<file path=ppt/slides/slide15.xml><?xml version="1.0" encoding="utf-8"?>
+<p:sld xmlns:a="http://schemas.openxmlformats.org/drawingml/2006/main" xmlns:p="http://schemas.openxmlformats.org/presentationml/2006/main" xmlns:r="http://schemas.openxmlformats.org/officeDocument/2006/relationships">
+  <p:cSld>
+    <p:spTree>
+      <p:nvGrpSpPr>
+        <p:cNvPr id="1" name=""/>
+        <p:cNvGrpSpPr/>
+        <p:nvPr/>
+      </p:nvGrpSpPr>
+      <p:grpSpPr/>
+      <p:sp>
+        <p:nvSpPr>
+          <p:cNvPr id="2" name="TextBox 1"/>
+          <p:cNvSpPr txBox="1"/>
+          <p:nvPr/>
+        </p:nvSpPr>
+        <p:spPr>
+          <a:xfrm>
+            <a:off x="457200" y="274320"/>
+            <a:ext cx="8229600" cy="640080"/>
+          </a:xfrm>
+          <a:prstGeom prst="rect">
+            <a:avLst/>
+          </a:prstGeom>
+          <a:noFill/>
+        </p:spPr>
+        <p:txBody>
+          <a:bodyPr wrap="square">
+            <a:spAutoFit/>
+          </a:bodyPr>
+          <a:lstStyle/>
+          <a:p>
+            <a:r>
+              <a:rPr sz="2200" b="1">
+                <a:solidFill>
+                  <a:srgbClr val="0B3D2E"/>
+                </a:solidFill>
+              </a:rPr>
+              <a:t>Diagrama de la clase</a:t>
+            </a:r>
+          </a:p>
+        </p:txBody>
+      </p:sp>
+      <p:pic>
+        <p:nvPicPr>
+          <p:cNvPr id="3" name="Picture 2" descr="0366a90198aadef1.png"/>
+          <p:cNvPicPr>
+            <a:picLocks noChangeAspect="1"/>
+          </p:cNvPicPr>
+          <p:nvPr/>
+        </p:nvPicPr>
+        <p:blipFill>
+          <a:blip r:embed="rId2"/>
+          <a:stretch>
+            <a:fillRect/>
+          </a:stretch>
+        </p:blipFill>
+        <p:spPr>
+          <a:xfrm>
+            <a:off x="457200" y="3410712"/>
+            <a:ext cx="8229600" cy="676656"/>
+          </a:xfrm>
+          <a:prstGeom prst="rect">
+            <a:avLst/>
+          </a:prstGeom>
+        </p:spPr>
+      </p:pic>
     </p:spTree>
   </p:cSld>
   <p:clrMapOvr>
@@ -3698,7 +4044,7 @@
                   <a:srgbClr val="22282E"/>
                 </a:solidFill>
               </a:rPr>
-              <a:t>•  Descubrir hosts vivos, puertos abiertos, servicios y versiones interactuando directamente con el objetivo mediante escaneo. El reconocimiento activo, sobre todo con nmap, convierte el mapa OSINT en una lista precisa de superficies atacables.</a:t>
+              <a:t>•  Descubrir hosts vivos, puertos abiertos, servicios y versiones interactuando directamente con el objetivo mediante escaneo. El reconocimiento activo, sobre todo con nmap, convierte el mapa OSINT en…</a:t>
             </a:r>
           </a:p>
         </p:txBody>
@@ -4092,7 +4438,7 @@
                   <a:srgbClr val="0B3D2E"/>
                 </a:solidFill>
               </a:rPr>
-              <a:t>📖 Definiciones y características</a:t>
+              <a:t>🧠 Explicación en profundidad</a:t>
             </a:r>
           </a:p>
         </p:txBody>
@@ -4130,82 +4476,97 @@
                   <a:srgbClr val="22282E"/>
                 </a:solidFill>
               </a:rPr>
-              <a:t>•  SYN scan (-sS): envía SYN y no completa el handshake. Característica clave: rápido y relativamente sigiloso; requiere privilegios de root.</a:t>
-            </a:r>
-          </a:p>
-          <a:p>
-            <a:pPr>
-              <a:spcAft>
-                <a:spcPts val="600"/>
-              </a:spcAft>
-            </a:pPr>
-            <a:r>
-              <a:rPr sz="1500">
-                <a:solidFill>
-                  <a:srgbClr val="22282E"/>
-                </a:solidFill>
-              </a:rPr>
-              <a:t>•  Connect scan (-sT): completa el three-way handshake vía la pila del SO. Característica clave: no necesita root pero es más ruidoso y lento.</a:t>
-            </a:r>
-          </a:p>
-          <a:p>
-            <a:pPr>
-              <a:spcAft>
-                <a:spcPts val="600"/>
-              </a:spcAft>
-            </a:pPr>
-            <a:r>
-              <a:rPr sz="1500">
-                <a:solidFill>
-                  <a:srgbClr val="22282E"/>
-                </a:solidFill>
-              </a:rPr>
-              <a:t>•  Detección de versión (-sV): interroga banners para identificar producto y versión. Característica clave: base para mapear CVEs.</a:t>
-            </a:r>
-          </a:p>
-          <a:p>
-            <a:pPr>
-              <a:spcAft>
-                <a:spcPts val="600"/>
-              </a:spcAft>
-            </a:pPr>
-            <a:r>
-              <a:rPr sz="1500">
-                <a:solidFill>
-                  <a:srgbClr val="22282E"/>
-                </a:solidFill>
-              </a:rPr>
-              <a:t>•  NSE: motor de scripts Lua de nmap. Característica clave: categorías como default, safe, vuln, auth para tareas concretas.</a:t>
-            </a:r>
-          </a:p>
-          <a:p>
-            <a:pPr>
-              <a:spcAft>
-                <a:spcPts val="600"/>
-              </a:spcAft>
-            </a:pPr>
-            <a:r>
-              <a:rPr sz="1500">
-                <a:solidFill>
-                  <a:srgbClr val="22282E"/>
-                </a:solidFill>
-              </a:rPr>
-              <a:t>•  Escaneo UDP (-sU): sondea puertos UDP. Característica clave: lento por la ausencia de respuestas; imprescindible para SNMP/DNS.</a:t>
-            </a:r>
-          </a:p>
-          <a:p>
-            <a:pPr>
-              <a:spcAft>
-                <a:spcPts val="600"/>
-              </a:spcAft>
-            </a:pPr>
-            <a:r>
-              <a:rPr sz="1500">
-                <a:solidFill>
-                  <a:srgbClr val="22282E"/>
-                </a:solidFill>
-              </a:rPr>
-              <a:t>•  Timing templates (-T0–-T5): presets de velocidad. Característica clave: -T4 es un buen equilibrio; -T0/-T1 para evasión.</a:t>
+              <a:t>•  El reconocimiento activo empieza en el instante en que se envía el primer paquete al</a:t>
+            </a:r>
+          </a:p>
+          <a:p>
+            <a:pPr>
+              <a:spcAft>
+                <a:spcPts val="600"/>
+              </a:spcAft>
+            </a:pPr>
+            <a:r>
+              <a:rPr sz="1500">
+                <a:solidFill>
+                  <a:srgbClr val="22282E"/>
+                </a:solidFill>
+              </a:rPr>
+              <a:t>•  objetivo. A cambio de esa exposición se obtiene lo que el recon pasivo no puede dar: el</a:t>
+            </a:r>
+          </a:p>
+          <a:p>
+            <a:pPr>
+              <a:spcAft>
+                <a:spcPts val="600"/>
+              </a:spcAft>
+            </a:pPr>
+            <a:r>
+              <a:rPr sz="1500">
+                <a:solidFill>
+                  <a:srgbClr val="22282E"/>
+                </a:solidFill>
+              </a:rPr>
+              <a:t>•  estado real y actual de la infraestructura —qué hosts están vivos ahora, qué puertos</a:t>
+            </a:r>
+          </a:p>
+          <a:p>
+            <a:pPr>
+              <a:spcAft>
+                <a:spcPts val="600"/>
+              </a:spcAft>
+            </a:pPr>
+            <a:r>
+              <a:rPr sz="1500">
+                <a:solidFill>
+                  <a:srgbClr val="22282E"/>
+                </a:solidFill>
+              </a:rPr>
+              <a:t>•  están abiertos en este momento, qué versiones exactas corren—. Todo lo de la [Clase 029 a</a:t>
+            </a:r>
+          </a:p>
+          <a:p>
+            <a:pPr>
+              <a:spcAft>
+                <a:spcPts val="600"/>
+              </a:spcAft>
+            </a:pPr>
+            <a:r>
+              <a:rPr sz="1500">
+                <a:solidFill>
+                  <a:srgbClr val="22282E"/>
+                </a:solidFill>
+              </a:rPr>
+              <a:t>•  la 033](../../parte-1-redes-y-seguridad-de-redes/029-nmap-descubrimiento-de-hosts-y-tecnicas-de-ping/README.md)</a:t>
+            </a:r>
+          </a:p>
+          <a:p>
+            <a:pPr>
+              <a:spcAft>
+                <a:spcPts val="600"/>
+              </a:spcAft>
+            </a:pPr>
+            <a:r>
+              <a:rPr sz="1500">
+                <a:solidFill>
+                  <a:srgbClr val="22282E"/>
+                </a:solidFill>
+              </a:rPr>
+              <a:t>•  se aplica aquí, pero con una diferencia de mentalidad importante: en un pentest cada</a:t>
+            </a:r>
+          </a:p>
+          <a:p>
+            <a:pPr>
+              <a:spcAft>
+                <a:spcPts val="600"/>
+              </a:spcAft>
+            </a:pPr>
+            <a:r>
+              <a:rPr sz="1500">
+                <a:solidFill>
+                  <a:srgbClr val="22282E"/>
+                </a:solidFill>
+              </a:rPr>
+              <a:t>•  paquete cuenta como evidencia y puede disparar una alerta, así que el recon activo se hace</a:t>
             </a:r>
           </a:p>
         </p:txBody>
@@ -4256,7 +4617,7 @@
                   <a:srgbClr val="0B3D2E"/>
                 </a:solidFill>
               </a:rPr>
-              <a:t>🧰 Herramientas y preparación</a:t>
+              <a:t>📖 Definiciones y características</a:t>
             </a:r>
           </a:p>
         </p:txBody>
@@ -4294,37 +4655,82 @@
                   <a:srgbClr val="22282E"/>
                 </a:solidFill>
               </a:rPr>
-              <a:t>•  sudo apt install -y nmap masscan</a:t>
-            </a:r>
-          </a:p>
-          <a:p>
-            <a:pPr>
-              <a:spcAft>
-                <a:spcPts val="600"/>
-              </a:spcAft>
-            </a:pPr>
-            <a:r>
-              <a:rPr sz="1500">
-                <a:solidFill>
-                  <a:srgbClr val="22282E"/>
-                </a:solidFill>
-              </a:rPr>
-              <a:t>•  nmap --version</a:t>
-            </a:r>
-          </a:p>
-          <a:p>
-            <a:pPr>
-              <a:spcAft>
-                <a:spcPts val="600"/>
-              </a:spcAft>
-            </a:pPr>
-            <a:r>
-              <a:rPr sz="1500">
-                <a:solidFill>
-                  <a:srgbClr val="22282E"/>
-                </a:solidFill>
-              </a:rPr>
-              <a:t>•  Monta un laboratorio aislado: Kali como atacante y Metasploitable 2/3 o una VM propia como objetivo, en una red host-only sin salida a Internet.</a:t>
+              <a:t>•  SYN scan (-sS): envía SYN y no completa el handshake. Característica clave: rápido y relativamente sigiloso; requiere privilegios de root.</a:t>
+            </a:r>
+          </a:p>
+          <a:p>
+            <a:pPr>
+              <a:spcAft>
+                <a:spcPts val="600"/>
+              </a:spcAft>
+            </a:pPr>
+            <a:r>
+              <a:rPr sz="1500">
+                <a:solidFill>
+                  <a:srgbClr val="22282E"/>
+                </a:solidFill>
+              </a:rPr>
+              <a:t>•  Connect scan (-sT): completa el three-way handshake vía la pila del SO. Característica clave: no necesita root pero es más ruidoso y lento.</a:t>
+            </a:r>
+          </a:p>
+          <a:p>
+            <a:pPr>
+              <a:spcAft>
+                <a:spcPts val="600"/>
+              </a:spcAft>
+            </a:pPr>
+            <a:r>
+              <a:rPr sz="1500">
+                <a:solidFill>
+                  <a:srgbClr val="22282E"/>
+                </a:solidFill>
+              </a:rPr>
+              <a:t>•  Detección de versión (-sV): interroga banners para identificar producto y versión. Característica clave: base para mapear CVEs.</a:t>
+            </a:r>
+          </a:p>
+          <a:p>
+            <a:pPr>
+              <a:spcAft>
+                <a:spcPts val="600"/>
+              </a:spcAft>
+            </a:pPr>
+            <a:r>
+              <a:rPr sz="1500">
+                <a:solidFill>
+                  <a:srgbClr val="22282E"/>
+                </a:solidFill>
+              </a:rPr>
+              <a:t>•  NSE: motor de scripts Lua de nmap. Característica clave: categorías como default, safe, vuln, auth para tareas concretas.</a:t>
+            </a:r>
+          </a:p>
+          <a:p>
+            <a:pPr>
+              <a:spcAft>
+                <a:spcPts val="600"/>
+              </a:spcAft>
+            </a:pPr>
+            <a:r>
+              <a:rPr sz="1500">
+                <a:solidFill>
+                  <a:srgbClr val="22282E"/>
+                </a:solidFill>
+              </a:rPr>
+              <a:t>•  Escaneo UDP (-sU): sondea puertos UDP. Característica clave: lento por la ausencia de respuestas; imprescindible para SNMP/DNS.</a:t>
+            </a:r>
+          </a:p>
+          <a:p>
+            <a:pPr>
+              <a:spcAft>
+                <a:spcPts val="600"/>
+              </a:spcAft>
+            </a:pPr>
+            <a:r>
+              <a:rPr sz="1500">
+                <a:solidFill>
+                  <a:srgbClr val="22282E"/>
+                </a:solidFill>
+              </a:rPr>
+              <a:t>•  Timing templates (-T0–-T5): presets de velocidad. Característica clave: -T4 es un buen equilibrio; -T0/-T1 para evasión.</a:t>
             </a:r>
           </a:p>
         </p:txBody>
@@ -4375,7 +4781,7 @@
                   <a:srgbClr val="0B3D2E"/>
                 </a:solidFill>
               </a:rPr>
-              <a:t>🧪 Laboratorio guiado</a:t>
+              <a:t>📔 Glosario</a:t>
             </a:r>
           </a:p>
         </p:txBody>
@@ -4413,97 +4819,97 @@
                   <a:srgbClr val="22282E"/>
                 </a:solidFill>
               </a:rPr>
-              <a:t>•  Sustituye TARGET por la IP de tu VM vulnerable (por ejemplo 192.168.56.101).</a:t>
-            </a:r>
-          </a:p>
-          <a:p>
-            <a:pPr>
-              <a:spcAft>
-                <a:spcPts val="600"/>
-              </a:spcAft>
-            </a:pPr>
-            <a:r>
-              <a:rPr sz="1500">
-                <a:solidFill>
-                  <a:srgbClr val="22282E"/>
-                </a:solidFill>
-              </a:rPr>
-              <a:t>•  Descubre hosts vivos en el segmento:</a:t>
-            </a:r>
-          </a:p>
-          <a:p>
-            <a:pPr>
-              <a:spcAft>
-                <a:spcPts val="600"/>
-              </a:spcAft>
-            </a:pPr>
-            <a:r>
-              <a:rPr sz="1500">
-                <a:solidFill>
-                  <a:srgbClr val="22282E"/>
-                </a:solidFill>
-              </a:rPr>
-              <a:t>•  sudo nmap -sn 192.168.56.0/24</a:t>
-            </a:r>
-          </a:p>
-          <a:p>
-            <a:pPr>
-              <a:spcAft>
-                <a:spcPts val="600"/>
-              </a:spcAft>
-            </a:pPr>
-            <a:r>
-              <a:rPr sz="1500">
-                <a:solidFill>
-                  <a:srgbClr val="22282E"/>
-                </a:solidFill>
-              </a:rPr>
-              <a:t>•  Escaneo SYN rápido de los 1000 puertos comunes:</a:t>
-            </a:r>
-          </a:p>
-          <a:p>
-            <a:pPr>
-              <a:spcAft>
-                <a:spcPts val="600"/>
-              </a:spcAft>
-            </a:pPr>
-            <a:r>
-              <a:rPr sz="1500">
-                <a:solidFill>
-                  <a:srgbClr val="22282E"/>
-                </a:solidFill>
-              </a:rPr>
-              <a:t>•  sudo nmap -sS -T4 TARGET</a:t>
-            </a:r>
-          </a:p>
-          <a:p>
-            <a:pPr>
-              <a:spcAft>
-                <a:spcPts val="600"/>
-              </a:spcAft>
-            </a:pPr>
-            <a:r>
-              <a:rPr sz="1500">
-                <a:solidFill>
-                  <a:srgbClr val="22282E"/>
-                </a:solidFill>
-              </a:rPr>
-              <a:t>•  Escaneo completo de todos los puertos TCP:</a:t>
-            </a:r>
-          </a:p>
-          <a:p>
-            <a:pPr>
-              <a:spcAft>
-                <a:spcPts val="600"/>
-              </a:spcAft>
-            </a:pPr>
-            <a:r>
-              <a:rPr sz="1500">
-                <a:solidFill>
-                  <a:srgbClr val="22282E"/>
-                </a:solidFill>
-              </a:rPr>
-              <a:t>•  sudo nmap -sS -p- -T4 TARGET -oA fulltcp</a:t>
+              <a:t>•  Término — Definición concisa</a:t>
+            </a:r>
+          </a:p>
+          <a:p>
+            <a:pPr>
+              <a:spcAft>
+                <a:spcPts val="600"/>
+              </a:spcAft>
+            </a:pPr>
+            <a:r>
+              <a:rPr sz="1500">
+                <a:solidFill>
+                  <a:srgbClr val="22282E"/>
+                </a:solidFill>
+              </a:rPr>
+              <a:t>•  Reconocimiento activo — Recolección enviando tráfico directo al objetivo</a:t>
+            </a:r>
+          </a:p>
+          <a:p>
+            <a:pPr>
+              <a:spcAft>
+                <a:spcPts val="600"/>
+              </a:spcAft>
+            </a:pPr>
+            <a:r>
+              <a:rPr sz="1500">
+                <a:solidFill>
+                  <a:srgbClr val="22282E"/>
+                </a:solidFill>
+              </a:rPr>
+              <a:t>•  Descubrimiento de hosts — Determinar qué direcciones están vivas (-sn)</a:t>
+            </a:r>
+          </a:p>
+          <a:p>
+            <a:pPr>
+              <a:spcAft>
+                <a:spcPts val="600"/>
+              </a:spcAft>
+            </a:pPr>
+            <a:r>
+              <a:rPr sz="1500">
+                <a:solidFill>
+                  <a:srgbClr val="22282E"/>
+                </a:solidFill>
+              </a:rPr>
+              <a:t>•  SYN scan (-sS) — Escaneo semiabierto; rápido, requiere privilegios</a:t>
+            </a:r>
+          </a:p>
+          <a:p>
+            <a:pPr>
+              <a:spcAft>
+                <a:spcPts val="600"/>
+              </a:spcAft>
+            </a:pPr>
+            <a:r>
+              <a:rPr sz="1500">
+                <a:solidFill>
+                  <a:srgbClr val="22282E"/>
+                </a:solidFill>
+              </a:rPr>
+              <a:t>•  Connect scan (-sT) — Usa connect(); sin privilegios pero visible</a:t>
+            </a:r>
+          </a:p>
+          <a:p>
+            <a:pPr>
+              <a:spcAft>
+                <a:spcPts val="600"/>
+              </a:spcAft>
+            </a:pPr>
+            <a:r>
+              <a:rPr sz="1500">
+                <a:solidFill>
+                  <a:srgbClr val="22282E"/>
+                </a:solidFill>
+              </a:rPr>
+              <a:t>•  Escaneo UDP (-sU) — Cubre DNS, SNMP, NTP; lento y ambiguo</a:t>
+            </a:r>
+          </a:p>
+          <a:p>
+            <a:pPr>
+              <a:spcAft>
+                <a:spcPts val="600"/>
+              </a:spcAft>
+            </a:pPr>
+            <a:r>
+              <a:rPr sz="1500">
+                <a:solidFill>
+                  <a:srgbClr val="22282E"/>
+                </a:solidFill>
+              </a:rPr>
+              <a:t>•  Detección de versión (-sV) — Identifica servicio y versión exactos</a:t>
             </a:r>
           </a:p>
         </p:txBody>
@@ -4554,7 +4960,7 @@
                   <a:srgbClr val="0B3D2E"/>
                 </a:solidFill>
               </a:rPr>
-              <a:t>✍️ Ejercicios</a:t>
+              <a:t>🧰 Herramientas y preparación</a:t>
             </a:r>
           </a:p>
         </p:txBody>
@@ -4592,82 +4998,7 @@
                   <a:srgbClr val="22282E"/>
                 </a:solidFill>
               </a:rPr>
-              <a:t>•  Explica por qué -sS requiere root y -sT no.</a:t>
-            </a:r>
-          </a:p>
-          <a:p>
-            <a:pPr>
-              <a:spcAft>
-                <a:spcPts val="600"/>
-              </a:spcAft>
-            </a:pPr>
-            <a:r>
-              <a:rPr sz="1500">
-                <a:solidFill>
-                  <a:srgbClr val="22282E"/>
-                </a:solidFill>
-              </a:rPr>
-              <a:t>•  Compara el tiempo de un escaneo -T2 frente a -T4 sobre el mismo objetivo.</a:t>
-            </a:r>
-          </a:p>
-          <a:p>
-            <a:pPr>
-              <a:spcAft>
-                <a:spcPts val="600"/>
-              </a:spcAft>
-            </a:pPr>
-            <a:r>
-              <a:rPr sz="1500">
-                <a:solidFill>
-                  <a:srgbClr val="22282E"/>
-                </a:solidFill>
-              </a:rPr>
-              <a:t>•  Usa NSE para obtener el título HTTP de un servidor web (--script http-title).</a:t>
-            </a:r>
-          </a:p>
-          <a:p>
-            <a:pPr>
-              <a:spcAft>
-                <a:spcPts val="600"/>
-              </a:spcAft>
-            </a:pPr>
-            <a:r>
-              <a:rPr sz="1500">
-                <a:solidFill>
-                  <a:srgbClr val="22282E"/>
-                </a:solidFill>
-              </a:rPr>
-              <a:t>•  Escanea solo los puertos UDP 53 y 161 e interpreta los estados open|filtered.</a:t>
-            </a:r>
-          </a:p>
-          <a:p>
-            <a:pPr>
-              <a:spcAft>
-                <a:spcPts val="600"/>
-              </a:spcAft>
-            </a:pPr>
-            <a:r>
-              <a:rPr sz="1500">
-                <a:solidFill>
-                  <a:srgbClr val="22282E"/>
-                </a:solidFill>
-              </a:rPr>
-              <a:t>•  Genera salida -oA y localiza el archivo .gnmap: ¿para qué sirve?</a:t>
-            </a:r>
-          </a:p>
-          <a:p>
-            <a:pPr>
-              <a:spcAft>
-                <a:spcPts val="600"/>
-              </a:spcAft>
-            </a:pPr>
-            <a:r>
-              <a:rPr sz="1500">
-                <a:solidFill>
-                  <a:srgbClr val="22282E"/>
-                </a:solidFill>
-              </a:rPr>
-              <a:t>•  Diseña un comando de escaneo sigiloso con --scan-delay y -T1.</a:t>
+              <a:t>•  Monta un laboratorio aislado: Kali como atacante y Metasploitable 2/3 o una VM propia como objetivo, en una red host-only sin salida a Internet.</a:t>
             </a:r>
           </a:p>
         </p:txBody>
@@ -4718,7 +5049,7 @@
                   <a:srgbClr val="0B3D2E"/>
                 </a:solidFill>
               </a:rPr>
-              <a:t>📝 Reto verificable</a:t>
+              <a:t>🧪 Laboratorio guiado</a:t>
             </a:r>
           </a:p>
         </p:txBody>
@@ -4756,22 +5087,97 @@
                   <a:srgbClr val="22282E"/>
                 </a:solidFill>
               </a:rPr>
-              <a:t>•  Produce un inventario de servicios de tu VM objetivo: lista de puertos abiertos TCP y UDP, servicio, versión y sistema operativo estimado, guardado con -oA.</a:t>
-            </a:r>
-          </a:p>
-          <a:p>
-            <a:pPr>
-              <a:spcAft>
-                <a:spcPts val="600"/>
-              </a:spcAft>
-            </a:pPr>
-            <a:r>
-              <a:rPr sz="1500">
-                <a:solidFill>
-                  <a:srgbClr val="22282E"/>
-                </a:solidFill>
-              </a:rPr>
-              <a:t>•  Criterio de aceptación: el inventario incluye al menos cinco puertos abiertos con su versión (-sV), un intento de detección de SO y los ficheros de salida .nmap, .gnmap y .xml presentes en disco.</a:t>
+              <a:t>•  Sustituye TARGET por la IP de tu VM vulnerable (por ejemplo 192.168.56.101).</a:t>
+            </a:r>
+          </a:p>
+          <a:p>
+            <a:pPr>
+              <a:spcAft>
+                <a:spcPts val="600"/>
+              </a:spcAft>
+            </a:pPr>
+            <a:r>
+              <a:rPr sz="1500">
+                <a:solidFill>
+                  <a:srgbClr val="22282E"/>
+                </a:solidFill>
+              </a:rPr>
+              <a:t>•  Descubre hosts vivos en el segmento:</a:t>
+            </a:r>
+          </a:p>
+          <a:p>
+            <a:pPr>
+              <a:spcAft>
+                <a:spcPts val="600"/>
+              </a:spcAft>
+            </a:pPr>
+            <a:r>
+              <a:rPr sz="1500">
+                <a:solidFill>
+                  <a:srgbClr val="22282E"/>
+                </a:solidFill>
+              </a:rPr>
+              <a:t>•  Escaneo SYN rápido de los 1000 puertos comunes:</a:t>
+            </a:r>
+          </a:p>
+          <a:p>
+            <a:pPr>
+              <a:spcAft>
+                <a:spcPts val="600"/>
+              </a:spcAft>
+            </a:pPr>
+            <a:r>
+              <a:rPr sz="1500">
+                <a:solidFill>
+                  <a:srgbClr val="22282E"/>
+                </a:solidFill>
+              </a:rPr>
+              <a:t>•  Escaneo completo de todos los puertos TCP:</a:t>
+            </a:r>
+          </a:p>
+          <a:p>
+            <a:pPr>
+              <a:spcAft>
+                <a:spcPts val="600"/>
+              </a:spcAft>
+            </a:pPr>
+            <a:r>
+              <a:rPr sz="1500">
+                <a:solidFill>
+                  <a:srgbClr val="22282E"/>
+                </a:solidFill>
+              </a:rPr>
+              <a:t>•  Detección de versión y SO sobre los puertos abiertos:</a:t>
+            </a:r>
+          </a:p>
+          <a:p>
+            <a:pPr>
+              <a:spcAft>
+                <a:spcPts val="600"/>
+              </a:spcAft>
+            </a:pPr>
+            <a:r>
+              <a:rPr sz="1500">
+                <a:solidFill>
+                  <a:srgbClr val="22282E"/>
+                </a:solidFill>
+              </a:rPr>
+              <a:t>•  Escaneo UDP de servicios clave:</a:t>
+            </a:r>
+          </a:p>
+          <a:p>
+            <a:pPr>
+              <a:spcAft>
+                <a:spcPts val="600"/>
+              </a:spcAft>
+            </a:pPr>
+            <a:r>
+              <a:rPr sz="1500">
+                <a:solidFill>
+                  <a:srgbClr val="22282E"/>
+                </a:solidFill>
+              </a:rPr>
+              <a:t>•  Enumeración con NSE (-sC = categoría default, es decir --script=default):</a:t>
             </a:r>
           </a:p>
         </p:txBody>
